--- a/презентація.pptx
+++ b/презентація.pptx
@@ -126,7 +126,7 @@
   </p:defaultTextStyle>
   <p:extLst>
     <p:ext uri="{EFAFB233-063F-42B5-8137-9DF3F51BA10A}">
-      <p15:sldGuideLst xmlns="" xmlns:p15="http://schemas.microsoft.com/office/powerpoint/2012/main"/>
+      <p15:sldGuideLst xmlns:p15="http://schemas.microsoft.com/office/powerpoint/2012/main" xmlns=""/>
     </p:ext>
   </p:extLst>
 </p:presentation>
@@ -214,7 +214,7 @@
           <a:p>
             <a:fld id="{A5DE561D-31C7-4B88-B0FD-EA98D357D148}" type="datetimeFigureOut">
               <a:rPr lang="ru-RU" smtClean="0"/>
-              <a:t>09.06.2024</a:t>
+              <a:t>12.06.2024</a:t>
             </a:fld>
             <a:endParaRPr lang="ru-RU"/>
           </a:p>
@@ -1282,7 +1282,7 @@
   </p:txStyles>
   <p:extLst>
     <p:ext uri="{27BBF7A9-308A-43DC-89C8-2F10F3537804}">
-      <p15:sldGuideLst xmlns="" xmlns:p15="http://schemas.microsoft.com/office/powerpoint/2012/main">
+      <p15:sldGuideLst xmlns:p15="http://schemas.microsoft.com/office/powerpoint/2012/main" xmlns="">
         <p15:guide id="1" orient="horz" pos="119" userDrawn="1">
           <p15:clr>
             <a:srgbClr val="F26B43"/>
@@ -1348,7 +1348,7 @@
         </p:nvSpPr>
         <p:spPr>
           <a:xfrm>
-            <a:off x="334962" y="1984006"/>
+            <a:off x="416242" y="937526"/>
             <a:ext cx="11522075" cy="3190553"/>
           </a:xfrm>
         </p:spPr>
@@ -1433,8 +1433,8 @@
         </p:nvSpPr>
         <p:spPr>
           <a:xfrm>
-            <a:off x="8382001" y="4724569"/>
-            <a:ext cx="3352264" cy="1708160"/>
+            <a:off x="8924270" y="3947328"/>
+            <a:ext cx="2877326" cy="1169551"/>
           </a:xfrm>
           <a:prstGeom prst="rect">
             <a:avLst/>
@@ -1447,78 +1447,6 @@
           </a:bodyPr>
           <a:lstStyle/>
           <a:p>
-            <a:pPr>
-              <a:lnSpc>
-                <a:spcPct val="125000"/>
-              </a:lnSpc>
-              <a:spcAft>
-                <a:spcPts val="0"/>
-              </a:spcAft>
-            </a:pPr>
-            <a:r>
-              <a:rPr lang="uk-UA" sz="1400" dirty="0">
-                <a:solidFill>
-                  <a:schemeClr val="bg1"/>
-                </a:solidFill>
-              </a:rPr>
-              <a:t>Виконав студент групи </a:t>
-            </a:r>
-            <a:r>
-              <a:rPr lang="ru-RU" sz="1400" dirty="0">
-                <a:solidFill>
-                  <a:schemeClr val="bg1"/>
-                </a:solidFill>
-              </a:rPr>
-              <a:t>ІПЗ-20-1</a:t>
-            </a:r>
-            <a:br>
-              <a:rPr lang="ru-RU" sz="1400" dirty="0">
-                <a:solidFill>
-                  <a:schemeClr val="bg1"/>
-                </a:solidFill>
-              </a:rPr>
-            </a:br>
-            <a:r>
-              <a:rPr lang="ru-RU" sz="1400" dirty="0">
-                <a:solidFill>
-                  <a:schemeClr val="bg1"/>
-                </a:solidFill>
-              </a:rPr>
-              <a:t>ВЕРБОВСЬКИЙ </a:t>
-            </a:r>
-            <a:r>
-              <a:rPr lang="ru-RU" sz="1400" dirty="0" err="1">
-                <a:solidFill>
-                  <a:schemeClr val="bg1"/>
-                </a:solidFill>
-              </a:rPr>
-              <a:t>Олександр</a:t>
-            </a:r>
-            <a:r>
-              <a:rPr lang="ru-RU" sz="1400" dirty="0">
-                <a:solidFill>
-                  <a:schemeClr val="bg1"/>
-                </a:solidFill>
-              </a:rPr>
-              <a:t> </a:t>
-            </a:r>
-            <a:r>
-              <a:rPr lang="ru-RU" sz="1400" dirty="0" err="1" smtClean="0">
-                <a:solidFill>
-                  <a:schemeClr val="bg1"/>
-                </a:solidFill>
-              </a:rPr>
-              <a:t>Юрійович</a:t>
-            </a:r>
-            <a:endParaRPr lang="ru-RU" sz="1400" dirty="0">
-              <a:solidFill>
-                <a:schemeClr val="bg1"/>
-              </a:solidFill>
-              <a:latin typeface="Times New Roman"/>
-              <a:ea typeface="Times New Roman"/>
-            </a:endParaRPr>
-          </a:p>
-          <a:p>
             <a:pPr algn="just">
               <a:lnSpc>
                 <a:spcPct val="125000"/>
@@ -1528,12 +1456,20 @@
               </a:spcAft>
             </a:pPr>
             <a:r>
+              <a:rPr lang="uk-UA" sz="1400" dirty="0" smtClean="0">
+                <a:solidFill>
+                  <a:schemeClr val="bg1"/>
+                </a:solidFill>
+              </a:rPr>
+              <a:t>Керівник </a:t>
+            </a:r>
+            <a:r>
               <a:rPr lang="uk-UA" sz="1400" dirty="0">
                 <a:solidFill>
                   <a:schemeClr val="bg1"/>
                 </a:solidFill>
               </a:rPr>
-              <a:t>Керівник роботи:</a:t>
+              <a:t>роботи:</a:t>
             </a:r>
             <a:endParaRPr lang="ru-RU" sz="1400" dirty="0">
               <a:solidFill>
@@ -1621,6 +1557,100 @@
                 </a:solidFill>
               </a:rPr>
               <a:t>Миколайович</a:t>
+            </a:r>
+            <a:endParaRPr lang="ru-RU" sz="1400" dirty="0">
+              <a:solidFill>
+                <a:schemeClr val="bg1"/>
+              </a:solidFill>
+              <a:latin typeface="Times New Roman"/>
+              <a:ea typeface="Times New Roman"/>
+            </a:endParaRPr>
+          </a:p>
+        </p:txBody>
+      </p:sp>
+      <p:sp>
+        <p:nvSpPr>
+          <p:cNvPr id="3" name="Прямоугольник 2"/>
+          <p:cNvSpPr/>
+          <p:nvPr/>
+        </p:nvSpPr>
+        <p:spPr>
+          <a:xfrm>
+            <a:off x="792480" y="4216633"/>
+            <a:ext cx="6096000" cy="630942"/>
+          </a:xfrm>
+          <a:prstGeom prst="rect">
+            <a:avLst/>
+          </a:prstGeom>
+        </p:spPr>
+        <p:txBody>
+          <a:bodyPr>
+            <a:spAutoFit/>
+          </a:bodyPr>
+          <a:lstStyle/>
+          <a:p>
+            <a:pPr>
+              <a:lnSpc>
+                <a:spcPct val="125000"/>
+              </a:lnSpc>
+              <a:spcAft>
+                <a:spcPts val="0"/>
+              </a:spcAft>
+            </a:pPr>
+            <a:r>
+              <a:rPr lang="uk-UA" sz="1400" dirty="0">
+                <a:solidFill>
+                  <a:schemeClr val="bg1"/>
+                </a:solidFill>
+              </a:rPr>
+              <a:t>Виконав студент групи </a:t>
+            </a:r>
+            <a:r>
+              <a:rPr lang="ru-RU" sz="1400" dirty="0">
+                <a:solidFill>
+                  <a:schemeClr val="bg1"/>
+                </a:solidFill>
+              </a:rPr>
+              <a:t>ІПЗ-20-1</a:t>
+            </a:r>
+            <a:br>
+              <a:rPr lang="ru-RU" sz="1400" dirty="0">
+                <a:solidFill>
+                  <a:schemeClr val="bg1"/>
+                </a:solidFill>
+              </a:rPr>
+            </a:br>
+            <a:r>
+              <a:rPr lang="ru-RU" sz="1400" dirty="0">
+                <a:solidFill>
+                  <a:schemeClr val="bg1"/>
+                </a:solidFill>
+              </a:rPr>
+              <a:t>ВЕРБОВСЬКИЙ </a:t>
+            </a:r>
+            <a:r>
+              <a:rPr lang="ru-RU" sz="1400" dirty="0" err="1">
+                <a:solidFill>
+                  <a:schemeClr val="bg1"/>
+                </a:solidFill>
+              </a:rPr>
+              <a:t>Олександр</a:t>
+            </a:r>
+            <a:r>
+              <a:rPr lang="ru-RU" sz="1400" dirty="0">
+                <a:solidFill>
+                  <a:schemeClr val="bg1"/>
+                </a:solidFill>
+              </a:rPr>
+              <a:t> </a:t>
+            </a:r>
+            <a:r>
+              <a:rPr lang="ru-RU" sz="1400" dirty="0" err="1">
+                <a:solidFill>
+                  <a:schemeClr val="bg1"/>
+                </a:solidFill>
+              </a:rPr>
+              <a:t>Юрійович</a:t>
             </a:r>
             <a:endParaRPr lang="ru-RU" sz="1400" dirty="0">
               <a:solidFill>
@@ -1771,7 +1801,7 @@
         <p:spPr>
           <a:xfrm>
             <a:off x="416864" y="1496814"/>
-            <a:ext cx="5354015" cy="2031325"/>
+            <a:ext cx="5354015" cy="1754326"/>
           </a:xfrm>
           <a:prstGeom prst="rect">
             <a:avLst/>
@@ -1890,23 +1920,8 @@
               <a:t> </a:t>
             </a:r>
             <a:r>
-              <a:rPr lang="ru-RU" dirty="0" err="1"/>
+              <a:rPr lang="ru-RU" dirty="0" err="1" smtClean="0"/>
               <a:t>масштабованості</a:t>
-            </a:r>
-            <a:r>
-              <a:rPr lang="uk-UA" dirty="0" smtClean="0"/>
-              <a:t/>
-            </a:r>
-            <a:br>
-              <a:rPr lang="uk-UA" dirty="0" smtClean="0"/>
-            </a:br>
-            <a:r>
-              <a:rPr lang="uk-UA" dirty="0" smtClean="0"/>
-              <a:t>- </a:t>
-            </a:r>
-            <a:r>
-              <a:rPr lang="ru-RU" dirty="0" err="1"/>
-              <a:t>безпека</a:t>
             </a:r>
             <a:r>
               <a:rPr lang="uk-UA" dirty="0" smtClean="0"/>
@@ -2635,7 +2650,7 @@
         <p:spPr>
           <a:xfrm>
             <a:off x="570733" y="2828835"/>
-            <a:ext cx="6096000" cy="2308324"/>
+            <a:ext cx="6096000" cy="2585323"/>
           </a:xfrm>
           <a:prstGeom prst="rect">
             <a:avLst/>
@@ -2724,7 +2739,7 @@
             </a:r>
             <a:r>
               <a:rPr lang="ru-RU" dirty="0" err="1" smtClean="0"/>
-              <a:t>вивід</a:t>
+              <a:t>виведення</a:t>
             </a:r>
             <a:r>
               <a:rPr lang="ru-RU" dirty="0" smtClean="0"/>
@@ -2798,6 +2813,22 @@
             <a:r>
               <a:rPr lang="ru-RU" dirty="0" err="1" smtClean="0"/>
               <a:t>інформації</a:t>
+            </a:r>
+            <a:r>
+              <a:rPr lang="ru-RU" dirty="0" smtClean="0"/>
+              <a:t> про </a:t>
+            </a:r>
+            <a:r>
+              <a:rPr lang="ru-RU" dirty="0" err="1" smtClean="0"/>
+              <a:t>задачі</a:t>
+            </a:r>
+            <a:r>
+              <a:rPr lang="ru-RU" dirty="0" smtClean="0"/>
+              <a:t> та </a:t>
+            </a:r>
+            <a:r>
+              <a:rPr lang="ru-RU" dirty="0" err="1" smtClean="0"/>
+              <a:t>користувачів</a:t>
             </a:r>
             <a:endParaRPr lang="ru-RU" dirty="0"/>
           </a:p>
@@ -3015,7 +3046,6 @@
               <a:rPr lang="uk-UA" dirty="0"/>
               <a:t>.</a:t>
             </a:r>
-            <a:endParaRPr lang="uk-UA" dirty="0"/>
           </a:p>
         </p:txBody>
       </p:sp>
@@ -4379,7 +4409,12 @@
             <p:ph type="body" sz="quarter" idx="10"/>
           </p:nvPr>
         </p:nvSpPr>
-        <p:spPr/>
+        <p:spPr>
+          <a:xfrm>
+            <a:off x="284163" y="1319530"/>
+            <a:ext cx="11522075" cy="4176713"/>
+          </a:xfrm>
+        </p:spPr>
         <p:txBody>
           <a:bodyPr/>
           <a:lstStyle/>
@@ -4548,12 +4583,32 @@
               <a:t> </a:t>
             </a:r>
             <a:r>
-              <a:rPr lang="ru-RU" sz="2400" b="0" dirty="0" err="1"/>
+              <a:rPr lang="ru-RU" sz="2400" b="0" dirty="0" err="1" smtClean="0"/>
               <a:t>реалізації</a:t>
             </a:r>
             <a:r>
-              <a:rPr lang="ru-RU" sz="2400" b="0" dirty="0"/>
-              <a:t>. Платформа </a:t>
+              <a:rPr lang="ru-RU" sz="2400" b="0" dirty="0" smtClean="0"/>
+              <a:t>, до </a:t>
+            </a:r>
+            <a:r>
+              <a:rPr lang="ru-RU" sz="2400" b="0" dirty="0" err="1" smtClean="0"/>
+              <a:t>тестування</a:t>
+            </a:r>
+            <a:r>
+              <a:rPr lang="ru-RU" sz="2400" b="0" dirty="0" smtClean="0"/>
+              <a:t> </a:t>
+            </a:r>
+            <a:r>
+              <a:rPr lang="ru-RU" sz="2400" b="0" dirty="0" err="1" smtClean="0"/>
+              <a:t>розробки</a:t>
+            </a:r>
+            <a:r>
+              <a:rPr lang="ru-RU" sz="2400" b="0" dirty="0" smtClean="0"/>
+              <a:t>. </a:t>
+            </a:r>
+            <a:r>
+              <a:rPr lang="ru-RU" sz="2400" b="0" dirty="0" smtClean="0"/>
+              <a:t>Платформа </a:t>
             </a:r>
             <a:r>
               <a:rPr lang="ru-RU" sz="2400" b="0" dirty="0" err="1"/>
@@ -4611,12 +4666,18 @@
               <a:rPr lang="ru-RU" sz="2400" b="0" dirty="0"/>
               <a:t>. </a:t>
             </a:r>
-            <a:r>
-              <a:rPr lang="ru-RU" sz="2400" b="0" dirty="0" err="1"/>
+            <a:endParaRPr lang="ru-RU" sz="2400" b="0" dirty="0" smtClean="0"/>
+          </a:p>
+          <a:p>
+            <a:pPr marL="0" indent="0">
+              <a:buNone/>
+            </a:pPr>
+            <a:r>
+              <a:rPr lang="ru-RU" sz="2400" b="0" dirty="0" err="1" smtClean="0"/>
               <a:t>Також</a:t>
             </a:r>
             <a:r>
-              <a:rPr lang="ru-RU" sz="2400" b="0" dirty="0"/>
+              <a:rPr lang="ru-RU" sz="2400" b="0" dirty="0" smtClean="0"/>
               <a:t> </a:t>
             </a:r>
             <a:r>
@@ -4771,12 +4832,18 @@
               <a:rPr lang="ru-RU" sz="2400" b="0" dirty="0"/>
               <a:t>. </a:t>
             </a:r>
-            <a:r>
-              <a:rPr lang="ru-RU" sz="2400" b="0" dirty="0" err="1"/>
+            <a:endParaRPr lang="ru-RU" sz="2400" b="0" dirty="0" smtClean="0"/>
+          </a:p>
+          <a:p>
+            <a:pPr marL="0" indent="0">
+              <a:buNone/>
+            </a:pPr>
+            <a:r>
+              <a:rPr lang="ru-RU" sz="2400" b="0" dirty="0" err="1" smtClean="0"/>
               <a:t>Після</a:t>
             </a:r>
             <a:r>
-              <a:rPr lang="ru-RU" sz="2400" b="0" dirty="0"/>
+              <a:rPr lang="ru-RU" sz="2400" b="0" dirty="0" smtClean="0"/>
               <a:t> </a:t>
             </a:r>
             <a:r>
@@ -6962,12 +7029,16 @@
               <a:t> через </a:t>
             </a:r>
             <a:r>
-              <a:rPr lang="ru-RU" dirty="0" err="1"/>
-              <a:t>вбудовану</a:t>
-            </a:r>
-            <a:r>
-              <a:rPr lang="ru-RU" dirty="0"/>
-              <a:t> систему оплати, </a:t>
+              <a:rPr lang="ru-RU" dirty="0" smtClean="0"/>
+              <a:t>систему </a:t>
+            </a:r>
+            <a:r>
+              <a:rPr lang="ru-RU" dirty="0" err="1"/>
+              <a:t>електронного</a:t>
+            </a:r>
+            <a:r>
+              <a:rPr lang="ru-RU" dirty="0"/>
+              <a:t> платежу, </a:t>
             </a:r>
             <a:r>
               <a:rPr lang="ru-RU" dirty="0" err="1"/>
@@ -10304,7 +10375,7 @@
   <a:extraClrSchemeLst/>
   <a:extLst>
     <a:ext uri="{05A4C25C-085E-4340-85A3-A5531E510DB2}">
-      <thm15:themeFamily xmlns="" xmlns:thm15="http://schemas.microsoft.com/office/thememl/2012/main" name="Office Theme" id="{62F939B6-93AF-4DB8-9C6B-D6C7DFDC589F}" vid="{4A3C46E8-61CC-4603-A589-7422A47A8E4A}"/>
+      <thm15:themeFamily xmlns:thm15="http://schemas.microsoft.com/office/thememl/2012/main" xmlns="" name="Office Theme" id="{62F939B6-93AF-4DB8-9C6B-D6C7DFDC589F}" vid="{4A3C46E8-61CC-4603-A589-7422A47A8E4A}"/>
     </a:ext>
   </a:extLst>
 </a:theme>
